--- a/class/cloud_infra_mgmt/11주차_Jenkins_CICD기초/01_강의자료/3차시_플러그인관리자계정첫Job.pptx
+++ b/class/cloud_infra_mgmt/11주차_Jenkins_CICD기초/01_강의자료/3차시_플러그인관리자계정첫Job.pptx
@@ -10183,7 +10183,7 @@
               </a:lnSpc>
             </a:pPr>
             <a:r>
-              <a:rPr sz="1500" b="1">
+              <a:rPr sz="1700" b="1">
                 <a:solidFill>
                   <a:srgbClr val="0D9488"/>
                 </a:solidFill>
@@ -10192,7 +10192,7 @@
               <a:t>●  </a:t>
             </a:r>
             <a:r>
-              <a:rPr sz="1500" b="0">
+              <a:rPr sz="1700" b="0">
                 <a:solidFill>
                   <a:srgbClr val="222733"/>
                 </a:solidFill>
@@ -10208,7 +10208,7 @@
               </a:lnSpc>
             </a:pPr>
             <a:r>
-              <a:rPr sz="1500" b="1">
+              <a:rPr sz="1700" b="1">
                 <a:solidFill>
                   <a:srgbClr val="0D9488"/>
                 </a:solidFill>
@@ -10217,7 +10217,7 @@
               <a:t>●  </a:t>
             </a:r>
             <a:r>
-              <a:rPr sz="1500" b="0">
+              <a:rPr sz="1700" b="0">
                 <a:solidFill>
                   <a:srgbClr val="222733"/>
                 </a:solidFill>
@@ -10233,7 +10233,7 @@
               </a:lnSpc>
             </a:pPr>
             <a:r>
-              <a:rPr sz="1500" b="1">
+              <a:rPr sz="1700" b="1">
                 <a:solidFill>
                   <a:srgbClr val="0D9488"/>
                 </a:solidFill>
@@ -10242,7 +10242,7 @@
               <a:t>●  </a:t>
             </a:r>
             <a:r>
-              <a:rPr sz="1500" b="0">
+              <a:rPr sz="1700" b="0">
                 <a:solidFill>
                   <a:srgbClr val="222733"/>
                 </a:solidFill>

--- a/class/cloud_infra_mgmt/11주차_Jenkins_CICD기초/01_강의자료/3차시_플러그인관리자계정첫Job.pptx
+++ b/class/cloud_infra_mgmt/11주차_Jenkins_CICD기초/01_강의자료/3차시_플러그인관리자계정첫Job.pptx
@@ -5312,7 +5312,7 @@
           <a:p>
             <a:pPr>
               <a:lnSpc>
-                <a:spcPct val="115000"/>
+                <a:spcPct val="149500"/>
               </a:lnSpc>
             </a:pPr>
             <a:r>
@@ -5337,7 +5337,7 @@
           <a:p>
             <a:pPr>
               <a:lnSpc>
-                <a:spcPct val="115000"/>
+                <a:spcPct val="149500"/>
               </a:lnSpc>
             </a:pPr>
             <a:r>
@@ -5362,7 +5362,7 @@
           <a:p>
             <a:pPr>
               <a:lnSpc>
-                <a:spcPct val="115000"/>
+                <a:spcPct val="149500"/>
               </a:lnSpc>
             </a:pPr>
             <a:r>
@@ -5753,7 +5753,7 @@
           <a:p>
             <a:pPr>
               <a:lnSpc>
-                <a:spcPct val="115000"/>
+                <a:spcPct val="149500"/>
               </a:lnSpc>
             </a:pPr>
             <a:r>
@@ -5778,7 +5778,7 @@
           <a:p>
             <a:pPr>
               <a:lnSpc>
-                <a:spcPct val="115000"/>
+                <a:spcPct val="149500"/>
               </a:lnSpc>
             </a:pPr>
             <a:r>
@@ -5803,7 +5803,7 @@
           <a:p>
             <a:pPr>
               <a:lnSpc>
-                <a:spcPct val="115000"/>
+                <a:spcPct val="149500"/>
               </a:lnSpc>
             </a:pPr>
             <a:r>
@@ -5828,7 +5828,7 @@
           <a:p>
             <a:pPr>
               <a:lnSpc>
-                <a:spcPct val="115000"/>
+                <a:spcPct val="149500"/>
               </a:lnSpc>
             </a:pPr>
             <a:r>
@@ -7336,16 +7336,104 @@
       </p:sp>
       <p:sp>
         <p:nvSpPr>
-          <p:cNvPr id="7" name="Isosceles Triangle 6"/>
+          <p:cNvPr id="7" name="Rectangle 6"/>
           <p:cNvSpPr/>
           <p:nvPr/>
         </p:nvSpPr>
         <p:spPr>
-          <a:xfrm rot="5400000">
-            <a:off x="3495751" y="1673352"/>
-            <a:ext cx="146304" cy="146304"/>
-          </a:xfrm>
-          <a:prstGeom prst="triangle">
+          <a:xfrm>
+            <a:off x="5096865" y="1730959"/>
+            <a:ext cx="1995220" cy="31089"/>
+          </a:xfrm>
+          <a:prstGeom prst="rect">
+            <a:avLst/>
+          </a:prstGeom>
+          <a:solidFill>
+            <a:srgbClr val="14B8A6"/>
+          </a:solidFill>
+          <a:ln>
+            <a:noFill/>
+          </a:ln>
+          <a:effectLst/>
+        </p:spPr>
+        <p:style>
+          <a:lnRef idx="1">
+            <a:schemeClr val="accent1"/>
+          </a:lnRef>
+          <a:fillRef idx="3">
+            <a:schemeClr val="accent1"/>
+          </a:fillRef>
+          <a:effectRef idx="2">
+            <a:schemeClr val="accent1"/>
+          </a:effectRef>
+          <a:fontRef idx="minor">
+            <a:schemeClr val="lt1"/>
+          </a:fontRef>
+        </p:style>
+        <p:txBody>
+          <a:bodyPr rtlCol="0" anchor="ctr"/>
+          <a:lstStyle/>
+          <a:p>
+            <a:pPr algn="ctr"/>
+          </a:p>
+        </p:txBody>
+      </p:sp>
+      <p:sp>
+        <p:nvSpPr>
+          <p:cNvPr id="8" name="Rectangle 7"/>
+          <p:cNvSpPr/>
+          <p:nvPr/>
+        </p:nvSpPr>
+        <p:spPr>
+          <a:xfrm>
+            <a:off x="7622438" y="1730959"/>
+            <a:ext cx="1995220" cy="31089"/>
+          </a:xfrm>
+          <a:prstGeom prst="rect">
+            <a:avLst/>
+          </a:prstGeom>
+          <a:solidFill>
+            <a:srgbClr val="14B8A6"/>
+          </a:solidFill>
+          <a:ln>
+            <a:noFill/>
+          </a:ln>
+          <a:effectLst/>
+        </p:spPr>
+        <p:style>
+          <a:lnRef idx="1">
+            <a:schemeClr val="accent1"/>
+          </a:lnRef>
+          <a:fillRef idx="3">
+            <a:schemeClr val="accent1"/>
+          </a:fillRef>
+          <a:effectRef idx="2">
+            <a:schemeClr val="accent1"/>
+          </a:effectRef>
+          <a:fontRef idx="minor">
+            <a:schemeClr val="lt1"/>
+          </a:fontRef>
+        </p:style>
+        <p:txBody>
+          <a:bodyPr rtlCol="0" anchor="ctr"/>
+          <a:lstStyle/>
+          <a:p>
+            <a:pPr algn="ctr"/>
+          </a:p>
+        </p:txBody>
+      </p:sp>
+      <p:sp>
+        <p:nvSpPr>
+          <p:cNvPr id="9" name="Oval 8"/>
+          <p:cNvSpPr/>
+          <p:nvPr/>
+        </p:nvSpPr>
+        <p:spPr>
+          <a:xfrm>
+            <a:off x="2040940" y="1481328"/>
+            <a:ext cx="530352" cy="530352"/>
+          </a:xfrm>
+          <a:prstGeom prst="ellipse">
             <a:avLst/>
           </a:prstGeom>
           <a:solidFill>
@@ -7380,227 +7468,7 @@
       </p:sp>
       <p:sp>
         <p:nvSpPr>
-          <p:cNvPr id="8" name="Rectangle 7"/>
-          <p:cNvSpPr/>
-          <p:nvPr/>
-        </p:nvSpPr>
-        <p:spPr>
-          <a:xfrm>
-            <a:off x="5096865" y="1730959"/>
-            <a:ext cx="1995220" cy="31089"/>
-          </a:xfrm>
-          <a:prstGeom prst="rect">
-            <a:avLst/>
-          </a:prstGeom>
-          <a:solidFill>
-            <a:srgbClr val="14B8A6"/>
-          </a:solidFill>
-          <a:ln>
-            <a:noFill/>
-          </a:ln>
-          <a:effectLst/>
-        </p:spPr>
-        <p:style>
-          <a:lnRef idx="1">
-            <a:schemeClr val="accent1"/>
-          </a:lnRef>
-          <a:fillRef idx="3">
-            <a:schemeClr val="accent1"/>
-          </a:fillRef>
-          <a:effectRef idx="2">
-            <a:schemeClr val="accent1"/>
-          </a:effectRef>
-          <a:fontRef idx="minor">
-            <a:schemeClr val="lt1"/>
-          </a:fontRef>
-        </p:style>
-        <p:txBody>
-          <a:bodyPr rtlCol="0" anchor="ctr"/>
-          <a:lstStyle/>
-          <a:p>
-            <a:pPr algn="ctr"/>
-          </a:p>
-        </p:txBody>
-      </p:sp>
-      <p:sp>
-        <p:nvSpPr>
-          <p:cNvPr id="9" name="Isosceles Triangle 8"/>
-          <p:cNvSpPr/>
-          <p:nvPr/>
-        </p:nvSpPr>
-        <p:spPr>
-          <a:xfrm rot="5400000">
-            <a:off x="6021324" y="1673352"/>
-            <a:ext cx="146304" cy="146304"/>
-          </a:xfrm>
-          <a:prstGeom prst="triangle">
-            <a:avLst/>
-          </a:prstGeom>
-          <a:solidFill>
-            <a:srgbClr val="0D9488"/>
-          </a:solidFill>
-          <a:ln>
-            <a:noFill/>
-          </a:ln>
-          <a:effectLst/>
-        </p:spPr>
-        <p:style>
-          <a:lnRef idx="1">
-            <a:schemeClr val="accent1"/>
-          </a:lnRef>
-          <a:fillRef idx="3">
-            <a:schemeClr val="accent1"/>
-          </a:fillRef>
-          <a:effectRef idx="2">
-            <a:schemeClr val="accent1"/>
-          </a:effectRef>
-          <a:fontRef idx="minor">
-            <a:schemeClr val="lt1"/>
-          </a:fontRef>
-        </p:style>
-        <p:txBody>
-          <a:bodyPr rtlCol="0" anchor="ctr"/>
-          <a:lstStyle/>
-          <a:p>
-            <a:pPr algn="ctr"/>
-          </a:p>
-        </p:txBody>
-      </p:sp>
-      <p:sp>
-        <p:nvSpPr>
-          <p:cNvPr id="10" name="Rectangle 9"/>
-          <p:cNvSpPr/>
-          <p:nvPr/>
-        </p:nvSpPr>
-        <p:spPr>
-          <a:xfrm>
-            <a:off x="7622438" y="1730959"/>
-            <a:ext cx="1995220" cy="31089"/>
-          </a:xfrm>
-          <a:prstGeom prst="rect">
-            <a:avLst/>
-          </a:prstGeom>
-          <a:solidFill>
-            <a:srgbClr val="14B8A6"/>
-          </a:solidFill>
-          <a:ln>
-            <a:noFill/>
-          </a:ln>
-          <a:effectLst/>
-        </p:spPr>
-        <p:style>
-          <a:lnRef idx="1">
-            <a:schemeClr val="accent1"/>
-          </a:lnRef>
-          <a:fillRef idx="3">
-            <a:schemeClr val="accent1"/>
-          </a:fillRef>
-          <a:effectRef idx="2">
-            <a:schemeClr val="accent1"/>
-          </a:effectRef>
-          <a:fontRef idx="minor">
-            <a:schemeClr val="lt1"/>
-          </a:fontRef>
-        </p:style>
-        <p:txBody>
-          <a:bodyPr rtlCol="0" anchor="ctr"/>
-          <a:lstStyle/>
-          <a:p>
-            <a:pPr algn="ctr"/>
-          </a:p>
-        </p:txBody>
-      </p:sp>
-      <p:sp>
-        <p:nvSpPr>
-          <p:cNvPr id="11" name="Isosceles Triangle 10"/>
-          <p:cNvSpPr/>
-          <p:nvPr/>
-        </p:nvSpPr>
-        <p:spPr>
-          <a:xfrm rot="5400000">
-            <a:off x="8546896" y="1673352"/>
-            <a:ext cx="146304" cy="146304"/>
-          </a:xfrm>
-          <a:prstGeom prst="triangle">
-            <a:avLst/>
-          </a:prstGeom>
-          <a:solidFill>
-            <a:srgbClr val="0D9488"/>
-          </a:solidFill>
-          <a:ln>
-            <a:noFill/>
-          </a:ln>
-          <a:effectLst/>
-        </p:spPr>
-        <p:style>
-          <a:lnRef idx="1">
-            <a:schemeClr val="accent1"/>
-          </a:lnRef>
-          <a:fillRef idx="3">
-            <a:schemeClr val="accent1"/>
-          </a:fillRef>
-          <a:effectRef idx="2">
-            <a:schemeClr val="accent1"/>
-          </a:effectRef>
-          <a:fontRef idx="minor">
-            <a:schemeClr val="lt1"/>
-          </a:fontRef>
-        </p:style>
-        <p:txBody>
-          <a:bodyPr rtlCol="0" anchor="ctr"/>
-          <a:lstStyle/>
-          <a:p>
-            <a:pPr algn="ctr"/>
-          </a:p>
-        </p:txBody>
-      </p:sp>
-      <p:sp>
-        <p:nvSpPr>
-          <p:cNvPr id="12" name="Oval 11"/>
-          <p:cNvSpPr/>
-          <p:nvPr/>
-        </p:nvSpPr>
-        <p:spPr>
-          <a:xfrm>
-            <a:off x="2040940" y="1481328"/>
-            <a:ext cx="530352" cy="530352"/>
-          </a:xfrm>
-          <a:prstGeom prst="ellipse">
-            <a:avLst/>
-          </a:prstGeom>
-          <a:solidFill>
-            <a:srgbClr val="0D9488"/>
-          </a:solidFill>
-          <a:ln>
-            <a:noFill/>
-          </a:ln>
-          <a:effectLst/>
-        </p:spPr>
-        <p:style>
-          <a:lnRef idx="1">
-            <a:schemeClr val="accent1"/>
-          </a:lnRef>
-          <a:fillRef idx="3">
-            <a:schemeClr val="accent1"/>
-          </a:fillRef>
-          <a:effectRef idx="2">
-            <a:schemeClr val="accent1"/>
-          </a:effectRef>
-          <a:fontRef idx="minor">
-            <a:schemeClr val="lt1"/>
-          </a:fontRef>
-        </p:style>
-        <p:txBody>
-          <a:bodyPr rtlCol="0" anchor="ctr"/>
-          <a:lstStyle/>
-          <a:p>
-            <a:pPr algn="ctr"/>
-          </a:p>
-        </p:txBody>
-      </p:sp>
-      <p:sp>
-        <p:nvSpPr>
-          <p:cNvPr id="13" name="TextBox 12"/>
+          <p:cNvPr id="10" name="TextBox 9"/>
           <p:cNvSpPr txBox="1"/>
           <p:nvPr/>
         </p:nvSpPr>
@@ -7635,7 +7503,7 @@
       </p:sp>
       <p:sp>
         <p:nvSpPr>
-          <p:cNvPr id="14" name="Rounded Rectangle 13"/>
+          <p:cNvPr id="11" name="Rounded Rectangle 10"/>
           <p:cNvSpPr/>
           <p:nvPr/>
         </p:nvSpPr>
@@ -7683,7 +7551,7 @@
       </p:sp>
       <p:sp>
         <p:nvSpPr>
-          <p:cNvPr id="15" name="TextBox 14"/>
+          <p:cNvPr id="12" name="TextBox 11"/>
           <p:cNvSpPr txBox="1"/>
           <p:nvPr/>
         </p:nvSpPr>
@@ -7718,7 +7586,7 @@
       </p:sp>
       <p:sp>
         <p:nvSpPr>
-          <p:cNvPr id="16" name="TextBox 15"/>
+          <p:cNvPr id="13" name="TextBox 12"/>
           <p:cNvSpPr txBox="1"/>
           <p:nvPr/>
         </p:nvSpPr>
@@ -7757,7 +7625,7 @@
       </p:sp>
       <p:sp>
         <p:nvSpPr>
-          <p:cNvPr id="17" name="Oval 16"/>
+          <p:cNvPr id="14" name="Oval 13"/>
           <p:cNvSpPr/>
           <p:nvPr/>
         </p:nvSpPr>
@@ -7801,7 +7669,7 @@
       </p:sp>
       <p:sp>
         <p:nvSpPr>
-          <p:cNvPr id="18" name="TextBox 17"/>
+          <p:cNvPr id="15" name="TextBox 14"/>
           <p:cNvSpPr txBox="1"/>
           <p:nvPr/>
         </p:nvSpPr>
@@ -7836,7 +7704,7 @@
       </p:sp>
       <p:sp>
         <p:nvSpPr>
-          <p:cNvPr id="19" name="Rounded Rectangle 18"/>
+          <p:cNvPr id="16" name="Rounded Rectangle 15"/>
           <p:cNvSpPr/>
           <p:nvPr/>
         </p:nvSpPr>
@@ -7884,7 +7752,7 @@
       </p:sp>
       <p:sp>
         <p:nvSpPr>
-          <p:cNvPr id="20" name="TextBox 19"/>
+          <p:cNvPr id="17" name="TextBox 16"/>
           <p:cNvSpPr txBox="1"/>
           <p:nvPr/>
         </p:nvSpPr>
@@ -7919,7 +7787,7 @@
       </p:sp>
       <p:sp>
         <p:nvSpPr>
-          <p:cNvPr id="21" name="TextBox 20"/>
+          <p:cNvPr id="18" name="TextBox 17"/>
           <p:cNvSpPr txBox="1"/>
           <p:nvPr/>
         </p:nvSpPr>
@@ -7958,7 +7826,7 @@
       </p:sp>
       <p:sp>
         <p:nvSpPr>
-          <p:cNvPr id="22" name="Oval 21"/>
+          <p:cNvPr id="19" name="Oval 18"/>
           <p:cNvSpPr/>
           <p:nvPr/>
         </p:nvSpPr>
@@ -8002,7 +7870,7 @@
       </p:sp>
       <p:sp>
         <p:nvSpPr>
-          <p:cNvPr id="23" name="TextBox 22"/>
+          <p:cNvPr id="20" name="TextBox 19"/>
           <p:cNvSpPr txBox="1"/>
           <p:nvPr/>
         </p:nvSpPr>
@@ -8037,7 +7905,7 @@
       </p:sp>
       <p:sp>
         <p:nvSpPr>
-          <p:cNvPr id="24" name="Rounded Rectangle 23"/>
+          <p:cNvPr id="21" name="Rounded Rectangle 20"/>
           <p:cNvSpPr/>
           <p:nvPr/>
         </p:nvSpPr>
@@ -8085,7 +7953,7 @@
       </p:sp>
       <p:sp>
         <p:nvSpPr>
-          <p:cNvPr id="25" name="TextBox 24"/>
+          <p:cNvPr id="22" name="TextBox 21"/>
           <p:cNvSpPr txBox="1"/>
           <p:nvPr/>
         </p:nvSpPr>
@@ -8120,7 +7988,7 @@
       </p:sp>
       <p:sp>
         <p:nvSpPr>
-          <p:cNvPr id="26" name="TextBox 25"/>
+          <p:cNvPr id="23" name="TextBox 22"/>
           <p:cNvSpPr txBox="1"/>
           <p:nvPr/>
         </p:nvSpPr>
@@ -8159,7 +8027,7 @@
       </p:sp>
       <p:sp>
         <p:nvSpPr>
-          <p:cNvPr id="27" name="Oval 26"/>
+          <p:cNvPr id="24" name="Oval 23"/>
           <p:cNvSpPr/>
           <p:nvPr/>
         </p:nvSpPr>
@@ -8203,7 +8071,7 @@
       </p:sp>
       <p:sp>
         <p:nvSpPr>
-          <p:cNvPr id="28" name="TextBox 27"/>
+          <p:cNvPr id="25" name="TextBox 24"/>
           <p:cNvSpPr txBox="1"/>
           <p:nvPr/>
         </p:nvSpPr>
@@ -8238,7 +8106,7 @@
       </p:sp>
       <p:sp>
         <p:nvSpPr>
-          <p:cNvPr id="29" name="Rounded Rectangle 28"/>
+          <p:cNvPr id="26" name="Rounded Rectangle 25"/>
           <p:cNvSpPr/>
           <p:nvPr/>
         </p:nvSpPr>
@@ -8286,7 +8154,7 @@
       </p:sp>
       <p:sp>
         <p:nvSpPr>
-          <p:cNvPr id="30" name="TextBox 29"/>
+          <p:cNvPr id="27" name="TextBox 26"/>
           <p:cNvSpPr txBox="1"/>
           <p:nvPr/>
         </p:nvSpPr>
@@ -8321,7 +8189,7 @@
       </p:sp>
       <p:sp>
         <p:nvSpPr>
-          <p:cNvPr id="31" name="TextBox 30"/>
+          <p:cNvPr id="28" name="TextBox 27"/>
           <p:cNvSpPr txBox="1"/>
           <p:nvPr/>
         </p:nvSpPr>
@@ -8360,7 +8228,7 @@
       </p:sp>
       <p:sp>
         <p:nvSpPr>
-          <p:cNvPr id="32" name="TextBox 31"/>
+          <p:cNvPr id="29" name="TextBox 28"/>
           <p:cNvSpPr txBox="1"/>
           <p:nvPr/>
         </p:nvSpPr>
@@ -8395,7 +8263,7 @@
       </p:sp>
       <p:sp>
         <p:nvSpPr>
-          <p:cNvPr id="33" name="TextBox 32"/>
+          <p:cNvPr id="30" name="TextBox 29"/>
           <p:cNvSpPr txBox="1"/>
           <p:nvPr/>
         </p:nvSpPr>
@@ -8430,7 +8298,7 @@
       </p:sp>
       <p:sp>
         <p:nvSpPr>
-          <p:cNvPr id="34" name="Rectangle 33"/>
+          <p:cNvPr id="31" name="Rectangle 30"/>
           <p:cNvSpPr/>
           <p:nvPr/>
         </p:nvSpPr>
@@ -8954,7 +8822,7 @@
           <a:p>
             <a:pPr>
               <a:lnSpc>
-                <a:spcPct val="115000"/>
+                <a:spcPct val="149500"/>
               </a:lnSpc>
             </a:pPr>
             <a:r>
@@ -8979,7 +8847,7 @@
           <a:p>
             <a:pPr>
               <a:lnSpc>
-                <a:spcPct val="115000"/>
+                <a:spcPct val="149500"/>
               </a:lnSpc>
             </a:pPr>
             <a:r>
@@ -9004,7 +8872,7 @@
           <a:p>
             <a:pPr>
               <a:lnSpc>
-                <a:spcPct val="115000"/>
+                <a:spcPct val="149500"/>
               </a:lnSpc>
             </a:pPr>
             <a:r>
@@ -9395,7 +9263,7 @@
           <a:p>
             <a:pPr>
               <a:lnSpc>
-                <a:spcPct val="115000"/>
+                <a:spcPct val="149500"/>
               </a:lnSpc>
             </a:pPr>
             <a:r>
@@ -9420,7 +9288,7 @@
           <a:p>
             <a:pPr>
               <a:lnSpc>
-                <a:spcPct val="115000"/>
+                <a:spcPct val="149500"/>
               </a:lnSpc>
             </a:pPr>
             <a:r>
@@ -9445,7 +9313,7 @@
           <a:p>
             <a:pPr>
               <a:lnSpc>
-                <a:spcPct val="115000"/>
+                <a:spcPct val="149500"/>
               </a:lnSpc>
             </a:pPr>
             <a:r>
@@ -10179,7 +10047,7 @@
           <a:p>
             <a:pPr>
               <a:lnSpc>
-                <a:spcPct val="115000"/>
+                <a:spcPct val="149500"/>
               </a:lnSpc>
             </a:pPr>
             <a:r>
@@ -10204,7 +10072,7 @@
           <a:p>
             <a:pPr>
               <a:lnSpc>
-                <a:spcPct val="115000"/>
+                <a:spcPct val="149500"/>
               </a:lnSpc>
             </a:pPr>
             <a:r>
@@ -10229,7 +10097,7 @@
           <a:p>
             <a:pPr>
               <a:lnSpc>
-                <a:spcPct val="115000"/>
+                <a:spcPct val="149500"/>
               </a:lnSpc>
             </a:pPr>
             <a:r>
@@ -10892,7 +10760,7 @@
           <a:p>
             <a:pPr>
               <a:lnSpc>
-                <a:spcPct val="115000"/>
+                <a:spcPct val="149500"/>
               </a:lnSpc>
             </a:pPr>
             <a:r>
@@ -10917,7 +10785,7 @@
           <a:p>
             <a:pPr>
               <a:lnSpc>
-                <a:spcPct val="115000"/>
+                <a:spcPct val="149500"/>
               </a:lnSpc>
             </a:pPr>
             <a:r>
@@ -10942,7 +10810,7 @@
           <a:p>
             <a:pPr>
               <a:lnSpc>
-                <a:spcPct val="115000"/>
+                <a:spcPct val="149500"/>
               </a:lnSpc>
             </a:pPr>
             <a:r>

--- a/class/cloud_infra_mgmt/11주차_Jenkins_CICD기초/01_강의자료/3차시_플러그인관리자계정첫Job.pptx
+++ b/class/cloud_infra_mgmt/11주차_Jenkins_CICD기초/01_강의자료/3차시_플러그인관리자계정첫Job.pptx
@@ -4948,6 +4948,8 @@
                   <a:srgbClr val="14B8A6"/>
                 </a:solidFill>
                 <a:latin typeface="맑은 고딕"/>
+                <a:ea typeface="맑은 고딕"/>
+                <a:cs typeface="맑은 고딕"/>
               </a:rPr>
               <a:t>클라우드인프라관리  ·  11주차 3차시</a:t>
             </a:r>
@@ -4983,6 +4985,8 @@
                   <a:srgbClr val="FFFFFF"/>
                 </a:solidFill>
                 <a:latin typeface="맑은 고딕"/>
+                <a:ea typeface="맑은 고딕"/>
+                <a:cs typeface="맑은 고딕"/>
               </a:rPr>
               <a:t>플러그인·관리자 계정·첫 Job</a:t>
             </a:r>
@@ -5018,6 +5022,8 @@
                   <a:srgbClr val="C9D3E6"/>
                 </a:solidFill>
                 <a:latin typeface="맑은 고딕"/>
+                <a:ea typeface="맑은 고딕"/>
+                <a:cs typeface="맑은 고딕"/>
               </a:rPr>
               <a:t>Jenkins 베이스캠프 완공하기</a:t>
             </a:r>
@@ -5053,6 +5059,8 @@
                   <a:srgbClr val="FFFFFF"/>
                 </a:solidFill>
                 <a:latin typeface="맑은 고딕"/>
+                <a:ea typeface="맑은 고딕"/>
+                <a:cs typeface="맑은 고딕"/>
               </a:rPr>
               <a:t>영남이공대학교 김지윤교수</a:t>
             </a:r>
@@ -5212,6 +5220,8 @@
                   <a:srgbClr val="14213D"/>
                 </a:solidFill>
                 <a:latin typeface="맑은 고딕"/>
+                <a:ea typeface="맑은 고딕"/>
+                <a:cs typeface="맑은 고딕"/>
               </a:rPr>
               <a:t>03</a:t>
             </a:r>
@@ -5247,6 +5257,8 @@
                   <a:srgbClr val="14B8A6"/>
                 </a:solidFill>
                 <a:latin typeface="맑은 고딕"/>
+                <a:ea typeface="맑은 고딕"/>
+                <a:cs typeface="맑은 고딕"/>
               </a:rPr>
               <a:t>실습 안내</a:t>
             </a:r>
@@ -5282,6 +5294,8 @@
                   <a:srgbClr val="FFFFFF"/>
                 </a:solidFill>
                 <a:latin typeface="맑은 고딕"/>
+                <a:ea typeface="맑은 고딕"/>
+                <a:cs typeface="맑은 고딕"/>
               </a:rPr>
               <a:t>Killercoda — Job 생성 실습</a:t>
             </a:r>
@@ -5321,6 +5335,8 @@
                   <a:srgbClr val="0D9488"/>
                 </a:solidFill>
                 <a:latin typeface="맑은 고딕"/>
+                <a:ea typeface="맑은 고딕"/>
+                <a:cs typeface="맑은 고딕"/>
               </a:rPr>
               <a:t>●  </a:t>
             </a:r>
@@ -5330,6 +5346,8 @@
                   <a:srgbClr val="222733"/>
                 </a:solidFill>
                 <a:latin typeface="맑은 고딕"/>
+                <a:ea typeface="맑은 고딕"/>
+                <a:cs typeface="맑은 고딕"/>
               </a:rPr>
               <a:t>임시 Jenkins 컨테이너에서 Freestyle Job을 처음부터 직접 생성</a:t>
             </a:r>
@@ -5346,6 +5364,8 @@
                   <a:srgbClr val="0D9488"/>
                 </a:solidFill>
                 <a:latin typeface="맑은 고딕"/>
+                <a:ea typeface="맑은 고딕"/>
+                <a:cs typeface="맑은 고딕"/>
               </a:rPr>
               <a:t>●  </a:t>
             </a:r>
@@ -5355,6 +5375,8 @@
                   <a:srgbClr val="222733"/>
                 </a:solidFill>
                 <a:latin typeface="맑은 고딕"/>
+                <a:ea typeface="맑은 고딕"/>
+                <a:cs typeface="맑은 고딕"/>
               </a:rPr>
               <a:t>Execute shell에 echo 명령 3단계(예: 시작 로그 → 작업 로그 → 완료 로그) 작성</a:t>
             </a:r>
@@ -5371,6 +5393,8 @@
                   <a:srgbClr val="0D9488"/>
                 </a:solidFill>
                 <a:latin typeface="맑은 고딕"/>
+                <a:ea typeface="맑은 고딕"/>
+                <a:cs typeface="맑은 고딕"/>
               </a:rPr>
               <a:t>●  </a:t>
             </a:r>
@@ -5380,6 +5404,8 @@
                   <a:srgbClr val="222733"/>
                 </a:solidFill>
                 <a:latin typeface="맑은 고딕"/>
+                <a:ea typeface="맑은 고딕"/>
+                <a:cs typeface="맑은 고딕"/>
               </a:rPr>
               <a:t>Build Now 실행 후 Console Output에서 순서대로 로그가 찍히는지 확인</a:t>
             </a:r>
@@ -5415,6 +5441,8 @@
                   <a:srgbClr val="5B6373"/>
                 </a:solidFill>
                 <a:latin typeface="맑은 고딕"/>
+                <a:ea typeface="맑은 고딕"/>
+                <a:cs typeface="맑은 고딕"/>
               </a:rPr>
               <a:t>클라우드인프라관리  ·  11주차 3차시</a:t>
             </a:r>
@@ -5450,6 +5478,8 @@
                   <a:srgbClr val="5B6373"/>
                 </a:solidFill>
                 <a:latin typeface="맑은 고딕"/>
+                <a:ea typeface="맑은 고딕"/>
+                <a:cs typeface="맑은 고딕"/>
               </a:rPr>
               <a:t>10 / 13</a:t>
             </a:r>
@@ -5653,6 +5683,8 @@
                   <a:srgbClr val="14213D"/>
                 </a:solidFill>
                 <a:latin typeface="맑은 고딕"/>
+                <a:ea typeface="맑은 고딕"/>
+                <a:cs typeface="맑은 고딕"/>
               </a:rPr>
               <a:t>03</a:t>
             </a:r>
@@ -5688,6 +5720,8 @@
                   <a:srgbClr val="14B8A6"/>
                 </a:solidFill>
                 <a:latin typeface="맑은 고딕"/>
+                <a:ea typeface="맑은 고딕"/>
+                <a:cs typeface="맑은 고딕"/>
               </a:rPr>
               <a:t>실습 안내</a:t>
             </a:r>
@@ -5723,6 +5757,8 @@
                   <a:srgbClr val="FFFFFF"/>
                 </a:solidFill>
                 <a:latin typeface="맑은 고딕"/>
+                <a:ea typeface="맑은 고딕"/>
+                <a:cs typeface="맑은 고딕"/>
               </a:rPr>
               <a:t>VM 안내 — 11주차 종합 제출</a:t>
             </a:r>
@@ -5762,6 +5798,8 @@
                   <a:srgbClr val="0D9488"/>
                 </a:solidFill>
                 <a:latin typeface="맑은 고딕"/>
+                <a:ea typeface="맑은 고딕"/>
+                <a:cs typeface="맑은 고딕"/>
               </a:rPr>
               <a:t>●  </a:t>
             </a:r>
@@ -5771,6 +5809,8 @@
                   <a:srgbClr val="222733"/>
                 </a:solidFill>
                 <a:latin typeface="맑은 고딕"/>
+                <a:ea typeface="맑은 고딕"/>
+                <a:cs typeface="맑은 고딕"/>
               </a:rPr>
               <a:t>개인 VM Jenkins에서 초기 설정 마법사(플러그인·관리자 계정) 완료</a:t>
             </a:r>
@@ -5787,6 +5827,8 @@
                   <a:srgbClr val="0D9488"/>
                 </a:solidFill>
                 <a:latin typeface="맑은 고딕"/>
+                <a:ea typeface="맑은 고딕"/>
+                <a:cs typeface="맑은 고딕"/>
               </a:rPr>
               <a:t>●  </a:t>
             </a:r>
@@ -5796,6 +5838,8 @@
                   <a:srgbClr val="222733"/>
                 </a:solidFill>
                 <a:latin typeface="맑은 고딕"/>
+                <a:ea typeface="맑은 고딕"/>
+                <a:cs typeface="맑은 고딕"/>
               </a:rPr>
               <a:t>hello-jenkins Freestyle Job 생성 후 Build Now 실행</a:t>
             </a:r>
@@ -5812,6 +5856,8 @@
                   <a:srgbClr val="0D9488"/>
                 </a:solidFill>
                 <a:latin typeface="맑은 고딕"/>
+                <a:ea typeface="맑은 고딕"/>
+                <a:cs typeface="맑은 고딕"/>
               </a:rPr>
               <a:t>●  </a:t>
             </a:r>
@@ -5821,6 +5867,8 @@
                   <a:srgbClr val="222733"/>
                 </a:solidFill>
                 <a:latin typeface="맑은 고딕"/>
+                <a:ea typeface="맑은 고딕"/>
+                <a:cs typeface="맑은 고딕"/>
               </a:rPr>
               <a:t>Console Output에 echo 결과가 출력된 화면 캡처</a:t>
             </a:r>
@@ -5837,6 +5885,8 @@
                   <a:srgbClr val="0D9488"/>
                 </a:solidFill>
                 <a:latin typeface="맑은 고딕"/>
+                <a:ea typeface="맑은 고딕"/>
+                <a:cs typeface="맑은 고딕"/>
               </a:rPr>
               <a:t>●  </a:t>
             </a:r>
@@ -5846,6 +5896,8 @@
                   <a:srgbClr val="222733"/>
                 </a:solidFill>
                 <a:latin typeface="맑은 고딕"/>
+                <a:ea typeface="맑은 고딕"/>
+                <a:cs typeface="맑은 고딕"/>
               </a:rPr>
               <a:t>11주차 1~3차시(개념·설치·첫Job) 실습을 종합해서 제출</a:t>
             </a:r>
@@ -5881,6 +5933,8 @@
                   <a:srgbClr val="5B6373"/>
                 </a:solidFill>
                 <a:latin typeface="맑은 고딕"/>
+                <a:ea typeface="맑은 고딕"/>
+                <a:cs typeface="맑은 고딕"/>
               </a:rPr>
               <a:t>클라우드인프라관리  ·  11주차 3차시</a:t>
             </a:r>
@@ -5916,6 +5970,8 @@
                   <a:srgbClr val="5B6373"/>
                 </a:solidFill>
                 <a:latin typeface="맑은 고딕"/>
+                <a:ea typeface="맑은 고딕"/>
+                <a:cs typeface="맑은 고딕"/>
               </a:rPr>
               <a:t>11 / 13</a:t>
             </a:r>
@@ -6101,6 +6157,8 @@
                   <a:srgbClr val="FFFFFF"/>
                 </a:solidFill>
                 <a:latin typeface="맑은 고딕"/>
+                <a:ea typeface="맑은 고딕"/>
+                <a:cs typeface="맑은 고딕"/>
               </a:rPr>
               <a:t>오늘의 정리</a:t>
             </a:r>
@@ -6154,6 +6212,8 @@
                   <a:srgbClr val="14213D"/>
                 </a:solidFill>
                 <a:latin typeface="맑은 고딕"/>
+                <a:ea typeface="맑은 고딕"/>
+                <a:cs typeface="맑은 고딕"/>
               </a:rPr>
               <a:t>1</a:t>
             </a:r>
@@ -6189,6 +6249,8 @@
                   <a:srgbClr val="FFFFFF"/>
                 </a:solidFill>
                 <a:latin typeface="맑은 고딕"/>
+                <a:ea typeface="맑은 고딕"/>
+                <a:cs typeface="맑은 고딕"/>
               </a:rPr>
               <a:t>Jenkins 초기 설정 마법사로 플러그인 설치와 관리자 계정 생성을 완료한다</a:t>
             </a:r>
@@ -6242,6 +6304,8 @@
                   <a:srgbClr val="14213D"/>
                 </a:solidFill>
                 <a:latin typeface="맑은 고딕"/>
+                <a:ea typeface="맑은 고딕"/>
+                <a:cs typeface="맑은 고딕"/>
               </a:rPr>
               <a:t>2</a:t>
             </a:r>
@@ -6277,6 +6341,8 @@
                   <a:srgbClr val="FFFFFF"/>
                 </a:solidFill>
                 <a:latin typeface="맑은 고딕"/>
+                <a:ea typeface="맑은 고딕"/>
+                <a:cs typeface="맑은 고딕"/>
               </a:rPr>
               <a:t>Freestyle Job은 Build Steps에 실행할 명령을 등록하고 Build Now로 실행하는 가장 단순한 Job 형태다</a:t>
             </a:r>
@@ -6418,6 +6484,8 @@
                   <a:srgbClr val="FFFFFF"/>
                 </a:solidFill>
                 <a:latin typeface="맑은 고딕"/>
+                <a:ea typeface="맑은 고딕"/>
+                <a:cs typeface="맑은 고딕"/>
               </a:rPr>
               <a:t>다음 주 예고</a:t>
             </a:r>
@@ -6453,6 +6521,8 @@
                   <a:srgbClr val="14B8A6"/>
                 </a:solidFill>
                 <a:latin typeface="맑은 고딕"/>
+                <a:ea typeface="맑은 고딕"/>
+                <a:cs typeface="맑은 고딕"/>
               </a:rPr>
               <a:t>다음 차시 예고 — 12주차 — Jenkinsfile 파이프라인 문법</a:t>
             </a:r>
@@ -6488,6 +6558,8 @@
                   <a:srgbClr val="FFFFFF"/>
                 </a:solidFill>
                 <a:latin typeface="맑은 고딕"/>
+                <a:ea typeface="맑은 고딕"/>
+                <a:cs typeface="맑은 고딕"/>
               </a:rPr>
               <a:t>오늘처럼 화면에서 클릭으로 설정하는 대신, Jenkinsfile이라는 코드로 빌드 과정을 선언하는 법을 배우고 GitHub과 자동 연동합니다.</a:t>
             </a:r>
@@ -6673,6 +6745,8 @@
                   <a:srgbClr val="14B8A6"/>
                 </a:solidFill>
                 <a:latin typeface="맑은 고딕"/>
+                <a:ea typeface="맑은 고딕"/>
+                <a:cs typeface="맑은 고딕"/>
               </a:rPr>
               <a:t>11주차를 마치며</a:t>
             </a:r>
@@ -6708,6 +6782,8 @@
                   <a:srgbClr val="FFFFFF"/>
                 </a:solidFill>
                 <a:latin typeface="맑은 고딕"/>
+                <a:ea typeface="맑은 고딕"/>
+                <a:cs typeface="맑은 고딕"/>
               </a:rPr>
               <a:t>수고하셨습니다!</a:t>
             </a:r>
@@ -6747,6 +6823,8 @@
                   <a:srgbClr val="C9D3E6"/>
                 </a:solidFill>
                 <a:latin typeface="맑은 고딕"/>
+                <a:ea typeface="맑은 고딕"/>
+                <a:cs typeface="맑은 고딕"/>
               </a:rPr>
               <a:t>Jenkins 서버를 직접 설치하고 첫 Job까지 실행하며, 13주차 대통합 실습의 베이스캠프를 완성하셨습니다.</a:t>
             </a:r>
@@ -6888,6 +6966,8 @@
                   <a:srgbClr val="14B8A6"/>
                 </a:solidFill>
                 <a:latin typeface="맑은 고딕"/>
+                <a:ea typeface="맑은 고딕"/>
+                <a:cs typeface="맑은 고딕"/>
               </a:rPr>
               <a:t>SESSION OVERVIEW</a:t>
             </a:r>
@@ -6923,6 +7003,8 @@
                   <a:srgbClr val="FFFFFF"/>
                 </a:solidFill>
                 <a:latin typeface="맑은 고딕"/>
+                <a:ea typeface="맑은 고딕"/>
+                <a:cs typeface="맑은 고딕"/>
               </a:rPr>
               <a:t>오늘의 학습 목표</a:t>
             </a:r>
@@ -6962,6 +7044,8 @@
                   <a:srgbClr val="222733"/>
                 </a:solidFill>
                 <a:latin typeface="맑은 고딕"/>
+                <a:ea typeface="맑은 고딕"/>
+                <a:cs typeface="맑은 고딕"/>
               </a:rPr>
               <a:t>1.  Jenkins 초기 설정 마법사(플러그인 설치·관리자 계정)를 완료한다</a:t>
             </a:r>
@@ -6978,6 +7062,8 @@
                   <a:srgbClr val="222733"/>
                 </a:solidFill>
                 <a:latin typeface="맑은 고딕"/>
+                <a:ea typeface="맑은 고딕"/>
+                <a:cs typeface="맑은 고딕"/>
               </a:rPr>
               <a:t>2.  Freestyle Job의 기본 구조를 이해한다</a:t>
             </a:r>
@@ -6994,6 +7080,8 @@
                   <a:srgbClr val="222733"/>
                 </a:solidFill>
                 <a:latin typeface="맑은 고딕"/>
+                <a:ea typeface="맑은 고딕"/>
+                <a:cs typeface="맑은 고딕"/>
               </a:rPr>
               <a:t>3.  echo 명령을 실행하는 첫 Job을 만들고 Build Now로 실행한다</a:t>
             </a:r>
@@ -7029,6 +7117,8 @@
                   <a:srgbClr val="5B6373"/>
                 </a:solidFill>
                 <a:latin typeface="맑은 고딕"/>
+                <a:ea typeface="맑은 고딕"/>
+                <a:cs typeface="맑은 고딕"/>
               </a:rPr>
               <a:t>클라우드인프라관리  ·  11주차 3차시</a:t>
             </a:r>
@@ -7064,6 +7154,8 @@
                   <a:srgbClr val="5B6373"/>
                 </a:solidFill>
                 <a:latin typeface="맑은 고딕"/>
+                <a:ea typeface="맑은 고딕"/>
+                <a:cs typeface="맑은 고딕"/>
               </a:rPr>
               <a:t>02 / 13</a:t>
             </a:r>
@@ -7249,6 +7341,8 @@
                   <a:srgbClr val="14B8A6"/>
                 </a:solidFill>
                 <a:latin typeface="맑은 고딕"/>
+                <a:ea typeface="맑은 고딕"/>
+                <a:cs typeface="맑은 고딕"/>
               </a:rPr>
               <a:t>SESSION OVERVIEW</a:t>
             </a:r>
@@ -7284,6 +7378,8 @@
                   <a:srgbClr val="FFFFFF"/>
                 </a:solidFill>
                 <a:latin typeface="맑은 고딕"/>
+                <a:ea typeface="맑은 고딕"/>
+                <a:cs typeface="맑은 고딕"/>
               </a:rPr>
               <a:t>오늘의 진행 순서</a:t>
             </a:r>
@@ -7495,6 +7591,8 @@
                   <a:srgbClr val="FFFFFF"/>
                 </a:solidFill>
                 <a:latin typeface="맑은 고딕"/>
+                <a:ea typeface="맑은 고딕"/>
+                <a:cs typeface="맑은 고딕"/>
               </a:rPr>
               <a:t>1</a:t>
             </a:r>
@@ -7578,6 +7676,8 @@
                   <a:srgbClr val="14213D"/>
                 </a:solidFill>
                 <a:latin typeface="맑은 고딕"/>
+                <a:ea typeface="맑은 고딕"/>
+                <a:cs typeface="맑은 고딕"/>
               </a:rPr>
               <a:t>개념 설명</a:t>
             </a:r>
@@ -7617,6 +7717,8 @@
                   <a:srgbClr val="222733"/>
                 </a:solidFill>
                 <a:latin typeface="맑은 고딕"/>
+                <a:ea typeface="맑은 고딕"/>
+                <a:cs typeface="맑은 고딕"/>
               </a:rPr>
               <a:t>강의자료 기반 직접 강의</a:t>
             </a:r>
@@ -7696,6 +7798,8 @@
                   <a:srgbClr val="FFFFFF"/>
                 </a:solidFill>
                 <a:latin typeface="맑은 고딕"/>
+                <a:ea typeface="맑은 고딕"/>
+                <a:cs typeface="맑은 고딕"/>
               </a:rPr>
               <a:t>2</a:t>
             </a:r>
@@ -7779,6 +7883,8 @@
                   <a:srgbClr val="14213D"/>
                 </a:solidFill>
                 <a:latin typeface="맑은 고딕"/>
+                <a:ea typeface="맑은 고딕"/>
+                <a:cs typeface="맑은 고딕"/>
               </a:rPr>
               <a:t>Killercoda</a:t>
             </a:r>
@@ -7818,6 +7924,8 @@
                   <a:srgbClr val="222733"/>
                 </a:solidFill>
                 <a:latin typeface="맑은 고딕"/>
+                <a:ea typeface="맑은 고딕"/>
+                <a:cs typeface="맑은 고딕"/>
               </a:rPr>
               <a:t>Job 생성 실습</a:t>
             </a:r>
@@ -7897,6 +8005,8 @@
                   <a:srgbClr val="FFFFFF"/>
                 </a:solidFill>
                 <a:latin typeface="맑은 고딕"/>
+                <a:ea typeface="맑은 고딕"/>
+                <a:cs typeface="맑은 고딕"/>
               </a:rPr>
               <a:t>3</a:t>
             </a:r>
@@ -7980,6 +8090,8 @@
                   <a:srgbClr val="14213D"/>
                 </a:solidFill>
                 <a:latin typeface="맑은 고딕"/>
+                <a:ea typeface="맑은 고딕"/>
+                <a:cs typeface="맑은 고딕"/>
               </a:rPr>
               <a:t>VM 안내</a:t>
             </a:r>
@@ -8019,6 +8131,8 @@
                   <a:srgbClr val="222733"/>
                 </a:solidFill>
                 <a:latin typeface="맑은 고딕"/>
+                <a:ea typeface="맑은 고딕"/>
+                <a:cs typeface="맑은 고딕"/>
               </a:rPr>
               <a:t>VM에서 동일 실습</a:t>
             </a:r>
@@ -8098,6 +8212,8 @@
                   <a:srgbClr val="FFFFFF"/>
                 </a:solidFill>
                 <a:latin typeface="맑은 고딕"/>
+                <a:ea typeface="맑은 고딕"/>
+                <a:cs typeface="맑은 고딕"/>
               </a:rPr>
               <a:t>4</a:t>
             </a:r>
@@ -8181,6 +8297,8 @@
                   <a:srgbClr val="14213D"/>
                 </a:solidFill>
                 <a:latin typeface="맑은 고딕"/>
+                <a:ea typeface="맑은 고딕"/>
+                <a:cs typeface="맑은 고딕"/>
               </a:rPr>
               <a:t>결과 제출</a:t>
             </a:r>
@@ -8220,6 +8338,8 @@
                   <a:srgbClr val="222733"/>
                 </a:solidFill>
                 <a:latin typeface="맑은 고딕"/>
+                <a:ea typeface="맑은 고딕"/>
+                <a:cs typeface="맑은 고딕"/>
               </a:rPr>
               <a:t>11주차 종합 제출</a:t>
             </a:r>
@@ -8255,6 +8375,8 @@
                   <a:srgbClr val="5B6373"/>
                 </a:solidFill>
                 <a:latin typeface="맑은 고딕"/>
+                <a:ea typeface="맑은 고딕"/>
+                <a:cs typeface="맑은 고딕"/>
               </a:rPr>
               <a:t>클라우드인프라관리  ·  11주차 3차시</a:t>
             </a:r>
@@ -8290,6 +8412,8 @@
                   <a:srgbClr val="5B6373"/>
                 </a:solidFill>
                 <a:latin typeface="맑은 고딕"/>
+                <a:ea typeface="맑은 고딕"/>
+                <a:cs typeface="맑은 고딕"/>
               </a:rPr>
               <a:t>03 / 13</a:t>
             </a:r>
@@ -8493,6 +8617,8 @@
                   <a:srgbClr val="14213D"/>
                 </a:solidFill>
                 <a:latin typeface="맑은 고딕"/>
+                <a:ea typeface="맑은 고딕"/>
+                <a:cs typeface="맑은 고딕"/>
               </a:rPr>
               <a:t>PART 01</a:t>
             </a:r>
@@ -8528,6 +8654,8 @@
                   <a:srgbClr val="FFFFFF"/>
                 </a:solidFill>
                 <a:latin typeface="맑은 고딕"/>
+                <a:ea typeface="맑은 고딕"/>
+                <a:cs typeface="맑은 고딕"/>
               </a:rPr>
               <a:t>초기 설정 마법사</a:t>
             </a:r>
@@ -8563,6 +8691,8 @@
                   <a:srgbClr val="C9D3E6"/>
                 </a:solidFill>
                 <a:latin typeface="맑은 고딕"/>
+                <a:ea typeface="맑은 고딕"/>
+                <a:cs typeface="맑은 고딕"/>
               </a:rPr>
               <a:t>설치 직후 딱 한 번 거치는 절차</a:t>
             </a:r>
@@ -8722,6 +8852,8 @@
                   <a:srgbClr val="14213D"/>
                 </a:solidFill>
                 <a:latin typeface="맑은 고딕"/>
+                <a:ea typeface="맑은 고딕"/>
+                <a:cs typeface="맑은 고딕"/>
               </a:rPr>
               <a:t>01</a:t>
             </a:r>
@@ -8757,6 +8889,8 @@
                   <a:srgbClr val="14B8A6"/>
                 </a:solidFill>
                 <a:latin typeface="맑은 고딕"/>
+                <a:ea typeface="맑은 고딕"/>
+                <a:cs typeface="맑은 고딕"/>
               </a:rPr>
               <a:t>PART 1 · 초기 설정</a:t>
             </a:r>
@@ -8792,6 +8926,8 @@
                   <a:srgbClr val="FFFFFF"/>
                 </a:solidFill>
                 <a:latin typeface="맑은 고딕"/>
+                <a:ea typeface="맑은 고딕"/>
+                <a:cs typeface="맑은 고딕"/>
               </a:rPr>
               <a:t>플러그인 설치 · 관리자 계정 생성</a:t>
             </a:r>
@@ -8831,6 +8967,8 @@
                   <a:srgbClr val="0D9488"/>
                 </a:solidFill>
                 <a:latin typeface="맑은 고딕"/>
+                <a:ea typeface="맑은 고딕"/>
+                <a:cs typeface="맑은 고딕"/>
               </a:rPr>
               <a:t>●  </a:t>
             </a:r>
@@ -8840,6 +8978,8 @@
                   <a:srgbClr val="222733"/>
                 </a:solidFill>
                 <a:latin typeface="맑은 고딕"/>
+                <a:ea typeface="맑은 고딕"/>
+                <a:cs typeface="맑은 고딕"/>
               </a:rPr>
               <a:t>초기 비밀번호 입력 후 'Install suggested plugins' 선택 — Git, Pipeline 등 기본 플러그인 자동 설치</a:t>
             </a:r>
@@ -8856,6 +8996,8 @@
                   <a:srgbClr val="0D9488"/>
                 </a:solidFill>
                 <a:latin typeface="맑은 고딕"/>
+                <a:ea typeface="맑은 고딕"/>
+                <a:cs typeface="맑은 고딕"/>
               </a:rPr>
               <a:t>●  </a:t>
             </a:r>
@@ -8865,6 +9007,8 @@
                   <a:srgbClr val="222733"/>
                 </a:solidFill>
                 <a:latin typeface="맑은 고딕"/>
+                <a:ea typeface="맑은 고딕"/>
+                <a:cs typeface="맑은 고딕"/>
               </a:rPr>
               <a:t>설치 완료 후 관리자 계정(아이디·비밀번호·이메일) 생성 — 이후 이 계정으로 로그인</a:t>
             </a:r>
@@ -8881,6 +9025,8 @@
                   <a:srgbClr val="0D9488"/>
                 </a:solidFill>
                 <a:latin typeface="맑은 고딕"/>
+                <a:ea typeface="맑은 고딕"/>
+                <a:cs typeface="맑은 고딕"/>
               </a:rPr>
               <a:t>●  </a:t>
             </a:r>
@@ -8890,6 +9036,8 @@
                   <a:srgbClr val="222733"/>
                 </a:solidFill>
                 <a:latin typeface="맑은 고딕"/>
+                <a:ea typeface="맑은 고딕"/>
+                <a:cs typeface="맑은 고딕"/>
               </a:rPr>
               <a:t>Jenkins URL 확인 화면까지 마치면 초기 설정 완료</a:t>
             </a:r>
@@ -8925,6 +9073,8 @@
                   <a:srgbClr val="5B6373"/>
                 </a:solidFill>
                 <a:latin typeface="맑은 고딕"/>
+                <a:ea typeface="맑은 고딕"/>
+                <a:cs typeface="맑은 고딕"/>
               </a:rPr>
               <a:t>클라우드인프라관리  ·  11주차 3차시</a:t>
             </a:r>
@@ -8960,6 +9110,8 @@
                   <a:srgbClr val="5B6373"/>
                 </a:solidFill>
                 <a:latin typeface="맑은 고딕"/>
+                <a:ea typeface="맑은 고딕"/>
+                <a:cs typeface="맑은 고딕"/>
               </a:rPr>
               <a:t>05 / 13</a:t>
             </a:r>
@@ -9163,6 +9315,8 @@
                   <a:srgbClr val="14213D"/>
                 </a:solidFill>
                 <a:latin typeface="맑은 고딕"/>
+                <a:ea typeface="맑은 고딕"/>
+                <a:cs typeface="맑은 고딕"/>
               </a:rPr>
               <a:t>01</a:t>
             </a:r>
@@ -9198,6 +9352,8 @@
                   <a:srgbClr val="14B8A6"/>
                 </a:solidFill>
                 <a:latin typeface="맑은 고딕"/>
+                <a:ea typeface="맑은 고딕"/>
+                <a:cs typeface="맑은 고딕"/>
               </a:rPr>
               <a:t>PART 1 · 초기 설정</a:t>
             </a:r>
@@ -9233,6 +9389,8 @@
                   <a:srgbClr val="FFFFFF"/>
                 </a:solidFill>
                 <a:latin typeface="맑은 고딕"/>
+                <a:ea typeface="맑은 고딕"/>
+                <a:cs typeface="맑은 고딕"/>
               </a:rPr>
               <a:t>이 계정 정보, 꼭 기억해두세요</a:t>
             </a:r>
@@ -9272,6 +9430,8 @@
                   <a:srgbClr val="0D9488"/>
                 </a:solidFill>
                 <a:latin typeface="맑은 고딕"/>
+                <a:ea typeface="맑은 고딕"/>
+                <a:cs typeface="맑은 고딕"/>
               </a:rPr>
               <a:t>●  </a:t>
             </a:r>
@@ -9281,6 +9441,8 @@
                   <a:srgbClr val="222733"/>
                 </a:solidFill>
                 <a:latin typeface="맑은 고딕"/>
+                <a:ea typeface="맑은 고딕"/>
+                <a:cs typeface="맑은 고딕"/>
               </a:rPr>
               <a:t>여기서 만든 관리자 계정은 앞으로 12~13주차까지 계속 사용합니다</a:t>
             </a:r>
@@ -9297,6 +9459,8 @@
                   <a:srgbClr val="0D9488"/>
                 </a:solidFill>
                 <a:latin typeface="맑은 고딕"/>
+                <a:ea typeface="맑은 고딕"/>
+                <a:cs typeface="맑은 고딕"/>
               </a:rPr>
               <a:t>●  </a:t>
             </a:r>
@@ -9306,6 +9470,8 @@
                   <a:srgbClr val="222733"/>
                 </a:solidFill>
                 <a:latin typeface="맑은 고딕"/>
+                <a:ea typeface="맑은 고딕"/>
+                <a:cs typeface="맑은 고딕"/>
               </a:rPr>
               <a:t>비밀번호를 잊어버리면 컨테이너 내부 파일을 다시 확인해야 하는 번거로움이 있음</a:t>
             </a:r>
@@ -9322,6 +9488,8 @@
                   <a:srgbClr val="0D9488"/>
                 </a:solidFill>
                 <a:latin typeface="맑은 고딕"/>
+                <a:ea typeface="맑은 고딕"/>
+                <a:cs typeface="맑은 고딕"/>
               </a:rPr>
               <a:t>●  </a:t>
             </a:r>
@@ -9331,6 +9499,8 @@
                   <a:srgbClr val="222733"/>
                 </a:solidFill>
                 <a:latin typeface="맑은 고딕"/>
+                <a:ea typeface="맑은 고딕"/>
+                <a:cs typeface="맑은 고딕"/>
               </a:rPr>
               <a:t>개인 메모장 등에 안전하게 기록해두는 것을 권장</a:t>
             </a:r>
@@ -9410,6 +9580,8 @@
                   <a:srgbClr val="FFFFFF"/>
                 </a:solidFill>
                 <a:latin typeface="맑은 고딕"/>
+                <a:ea typeface="맑은 고딕"/>
+                <a:cs typeface="맑은 고딕"/>
               </a:rPr>
               <a:t>📌  다음 주 예고</a:t>
             </a:r>
@@ -9445,6 +9617,8 @@
                   <a:srgbClr val="FFFFFF"/>
                 </a:solidFill>
                 <a:latin typeface="맑은 고딕"/>
+                <a:ea typeface="맑은 고딕"/>
+                <a:cs typeface="맑은 고딕"/>
               </a:rPr>
               <a:t>이 계정으로 12주차에 Jenkinsfile 기반 Job을, 13주차에 자동배포 파이프라인을 만듭니다</a:t>
             </a:r>
@@ -9480,6 +9654,8 @@
                   <a:srgbClr val="5B6373"/>
                 </a:solidFill>
                 <a:latin typeface="맑은 고딕"/>
+                <a:ea typeface="맑은 고딕"/>
+                <a:cs typeface="맑은 고딕"/>
               </a:rPr>
               <a:t>클라우드인프라관리  ·  11주차 3차시</a:t>
             </a:r>
@@ -9515,6 +9691,8 @@
                   <a:srgbClr val="5B6373"/>
                 </a:solidFill>
                 <a:latin typeface="맑은 고딕"/>
+                <a:ea typeface="맑은 고딕"/>
+                <a:cs typeface="맑은 고딕"/>
               </a:rPr>
               <a:t>06 / 13</a:t>
             </a:r>
@@ -9718,6 +9896,8 @@
                   <a:srgbClr val="14213D"/>
                 </a:solidFill>
                 <a:latin typeface="맑은 고딕"/>
+                <a:ea typeface="맑은 고딕"/>
+                <a:cs typeface="맑은 고딕"/>
               </a:rPr>
               <a:t>PART 02</a:t>
             </a:r>
@@ -9753,6 +9933,8 @@
                   <a:srgbClr val="FFFFFF"/>
                 </a:solidFill>
                 <a:latin typeface="맑은 고딕"/>
+                <a:ea typeface="맑은 고딕"/>
+                <a:cs typeface="맑은 고딕"/>
               </a:rPr>
               <a:t>첫 Job 만들기</a:t>
             </a:r>
@@ -9788,6 +9970,8 @@
                   <a:srgbClr val="C9D3E6"/>
                 </a:solidFill>
                 <a:latin typeface="맑은 고딕"/>
+                <a:ea typeface="맑은 고딕"/>
+                <a:cs typeface="맑은 고딕"/>
               </a:rPr>
               <a:t>Freestyle Job으로 감을 잡는다</a:t>
             </a:r>
@@ -9947,6 +10131,8 @@
                   <a:srgbClr val="14213D"/>
                 </a:solidFill>
                 <a:latin typeface="맑은 고딕"/>
+                <a:ea typeface="맑은 고딕"/>
+                <a:cs typeface="맑은 고딕"/>
               </a:rPr>
               <a:t>02</a:t>
             </a:r>
@@ -9982,6 +10168,8 @@
                   <a:srgbClr val="14B8A6"/>
                 </a:solidFill>
                 <a:latin typeface="맑은 고딕"/>
+                <a:ea typeface="맑은 고딕"/>
+                <a:cs typeface="맑은 고딕"/>
               </a:rPr>
               <a:t>PART 2 · 첫 Job</a:t>
             </a:r>
@@ -10017,6 +10205,8 @@
                   <a:srgbClr val="FFFFFF"/>
                 </a:solidFill>
                 <a:latin typeface="맑은 고딕"/>
+                <a:ea typeface="맑은 고딕"/>
+                <a:cs typeface="맑은 고딕"/>
               </a:rPr>
               <a:t>Freestyle Job의 기본 구조</a:t>
             </a:r>
@@ -10056,6 +10246,8 @@
                   <a:srgbClr val="0D9488"/>
                 </a:solidFill>
                 <a:latin typeface="맑은 고딕"/>
+                <a:ea typeface="맑은 고딕"/>
+                <a:cs typeface="맑은 고딕"/>
               </a:rPr>
               <a:t>●  </a:t>
             </a:r>
@@ -10065,6 +10257,8 @@
                   <a:srgbClr val="222733"/>
                 </a:solidFill>
                 <a:latin typeface="맑은 고딕"/>
+                <a:ea typeface="맑은 고딕"/>
+                <a:cs typeface="맑은 고딕"/>
               </a:rPr>
               <a:t>New Item → Freestyle project 선택 → Job 이름 입력</a:t>
             </a:r>
@@ -10081,6 +10275,8 @@
                   <a:srgbClr val="0D9488"/>
                 </a:solidFill>
                 <a:latin typeface="맑은 고딕"/>
+                <a:ea typeface="맑은 고딕"/>
+                <a:cs typeface="맑은 고딕"/>
               </a:rPr>
               <a:t>●  </a:t>
             </a:r>
@@ -10090,6 +10286,8 @@
                   <a:srgbClr val="222733"/>
                 </a:solidFill>
                 <a:latin typeface="맑은 고딕"/>
+                <a:ea typeface="맑은 고딕"/>
+                <a:cs typeface="맑은 고딕"/>
               </a:rPr>
               <a:t>Build Steps에 'Execute shell' 추가 → 실행할 명령어(예: echo) 입력</a:t>
             </a:r>
@@ -10106,6 +10304,8 @@
                   <a:srgbClr val="0D9488"/>
                 </a:solidFill>
                 <a:latin typeface="맑은 고딕"/>
+                <a:ea typeface="맑은 고딕"/>
+                <a:cs typeface="맑은 고딕"/>
               </a:rPr>
               <a:t>●  </a:t>
             </a:r>
@@ -10115,6 +10315,8 @@
                   <a:srgbClr val="222733"/>
                 </a:solidFill>
                 <a:latin typeface="맑은 고딕"/>
+                <a:ea typeface="맑은 고딕"/>
+                <a:cs typeface="맑은 고딕"/>
               </a:rPr>
               <a:t>저장 후 'Build Now' 클릭 → Build 이력에 실행 결과(Console Output)가 남음</a:t>
             </a:r>
@@ -10150,6 +10352,8 @@
                   <a:srgbClr val="14213D"/>
                 </a:solidFill>
                 <a:latin typeface="맑은 고딕"/>
+                <a:ea typeface="맑은 고딕"/>
+                <a:cs typeface="맑은 고딕"/>
               </a:rPr>
               <a:t>Job 생성 흐름</a:t>
             </a:r>
@@ -10229,6 +10433,8 @@
                   <a:srgbClr val="FFFFFF"/>
                 </a:solidFill>
                 <a:latin typeface="맑은 고딕"/>
+                <a:ea typeface="맑은 고딕"/>
+                <a:cs typeface="맑은 고딕"/>
               </a:rPr>
               <a:t>Job 생성</a:t>
             </a:r>
@@ -10308,6 +10514,8 @@
                   <a:srgbClr val="FFFFFF"/>
                 </a:solidFill>
                 <a:latin typeface="맑은 고딕"/>
+                <a:ea typeface="맑은 고딕"/>
+                <a:cs typeface="맑은 고딕"/>
               </a:rPr>
               <a:t>Build Steps 설정</a:t>
             </a:r>
@@ -10387,6 +10595,8 @@
                   <a:srgbClr val="FFFFFF"/>
                 </a:solidFill>
                 <a:latin typeface="맑은 고딕"/>
+                <a:ea typeface="맑은 고딕"/>
+                <a:cs typeface="맑은 고딕"/>
               </a:rPr>
               <a:t>Build Now → Console Output 확인</a:t>
             </a:r>
@@ -10422,6 +10632,8 @@
                   <a:srgbClr val="5B6373"/>
                 </a:solidFill>
                 <a:latin typeface="맑은 고딕"/>
+                <a:ea typeface="맑은 고딕"/>
+                <a:cs typeface="맑은 고딕"/>
               </a:rPr>
               <a:t>클라우드인프라관리  ·  11주차 3차시</a:t>
             </a:r>
@@ -10457,6 +10669,8 @@
                   <a:srgbClr val="5B6373"/>
                 </a:solidFill>
                 <a:latin typeface="맑은 고딕"/>
+                <a:ea typeface="맑은 고딕"/>
+                <a:cs typeface="맑은 고딕"/>
               </a:rPr>
               <a:t>08 / 13</a:t>
             </a:r>
@@ -10660,6 +10874,8 @@
                   <a:srgbClr val="14213D"/>
                 </a:solidFill>
                 <a:latin typeface="맑은 고딕"/>
+                <a:ea typeface="맑은 고딕"/>
+                <a:cs typeface="맑은 고딕"/>
               </a:rPr>
               <a:t>02</a:t>
             </a:r>
@@ -10695,6 +10911,8 @@
                   <a:srgbClr val="14B8A6"/>
                 </a:solidFill>
                 <a:latin typeface="맑은 고딕"/>
+                <a:ea typeface="맑은 고딕"/>
+                <a:cs typeface="맑은 고딕"/>
               </a:rPr>
               <a:t>PART 2 · 첫 Job</a:t>
             </a:r>
@@ -10730,6 +10948,8 @@
                   <a:srgbClr val="FFFFFF"/>
                 </a:solidFill>
                 <a:latin typeface="맑은 고딕"/>
+                <a:ea typeface="맑은 고딕"/>
+                <a:cs typeface="맑은 고딕"/>
               </a:rPr>
               <a:t>오늘 만들 Job — hello-jenkins</a:t>
             </a:r>
@@ -10769,6 +10989,8 @@
                   <a:srgbClr val="0D9488"/>
                 </a:solidFill>
                 <a:latin typeface="맑은 고딕"/>
+                <a:ea typeface="맑은 고딕"/>
+                <a:cs typeface="맑은 고딕"/>
               </a:rPr>
               <a:t>●  </a:t>
             </a:r>
@@ -10778,6 +11000,8 @@
                   <a:srgbClr val="222733"/>
                 </a:solidFill>
                 <a:latin typeface="맑은 고딕"/>
+                <a:ea typeface="맑은 고딕"/>
+                <a:cs typeface="맑은 고딕"/>
               </a:rPr>
               <a:t>Job 이름: hello-jenkins (Freestyle project)</a:t>
             </a:r>
@@ -10794,6 +11018,8 @@
                   <a:srgbClr val="0D9488"/>
                 </a:solidFill>
                 <a:latin typeface="맑은 고딕"/>
+                <a:ea typeface="맑은 고딕"/>
+                <a:cs typeface="맑은 고딕"/>
               </a:rPr>
               <a:t>●  </a:t>
             </a:r>
@@ -10803,6 +11029,8 @@
                   <a:srgbClr val="222733"/>
                 </a:solidFill>
                 <a:latin typeface="맑은 고딕"/>
+                <a:ea typeface="맑은 고딕"/>
+                <a:cs typeface="맑은 고딕"/>
               </a:rPr>
               <a:t>Build Steps → Execute shell → echo "Hello, Jenkins! Build number: $BUILD_NUMBER"</a:t>
             </a:r>
@@ -10819,6 +11047,8 @@
                   <a:srgbClr val="0D9488"/>
                 </a:solidFill>
                 <a:latin typeface="맑은 고딕"/>
+                <a:ea typeface="맑은 고딕"/>
+                <a:cs typeface="맑은 고딕"/>
               </a:rPr>
               <a:t>●  </a:t>
             </a:r>
@@ -10828,6 +11058,8 @@
                   <a:srgbClr val="222733"/>
                 </a:solidFill>
                 <a:latin typeface="맑은 고딕"/>
+                <a:ea typeface="맑은 고딕"/>
+                <a:cs typeface="맑은 고딕"/>
               </a:rPr>
               <a:t>Build Now 실행 후 Console Output에서 echo 결과와 빌드 번호 확인</a:t>
             </a:r>
@@ -10863,6 +11095,8 @@
                   <a:srgbClr val="5B6373"/>
                 </a:solidFill>
                 <a:latin typeface="맑은 고딕"/>
+                <a:ea typeface="맑은 고딕"/>
+                <a:cs typeface="맑은 고딕"/>
               </a:rPr>
               <a:t>클라우드인프라관리  ·  11주차 3차시</a:t>
             </a:r>
@@ -10898,6 +11132,8 @@
                   <a:srgbClr val="5B6373"/>
                 </a:solidFill>
                 <a:latin typeface="맑은 고딕"/>
+                <a:ea typeface="맑은 고딕"/>
+                <a:cs typeface="맑은 고딕"/>
               </a:rPr>
               <a:t>09 / 13</a:t>
             </a:r>
